--- a/Slides/Semana 11/semana_11_slides.pptx
+++ b/Slides/Semana 11/semana_11_slides.pptx
@@ -518,7 +518,7 @@
           <a:p>
             <a:r>
               <a:rPr lang="en-US" dirty="0"/>
-              <a:t>Notas: Abertura da mini aula (20 min). Unidade III — Pintura Digital e Bake. Crítica 🔴 FORMAL (CF4) nesta semana — a 4ª das 6, primeira a avaliar o Critério 6 (Bake). Mensagem central: até agora todo detalhe foi pintado à mão sobre o low-poly (S09 desgaste, S10 stencil). Hoje entra uma peça nova de workflow — esculpir/modelar detalhe em uma malha auxiliar de alta resolução e TRANSFERIR esse detalhe para o low-poly pelo bake. Deixar claro na capa: o bake não substitui a pintura; ele resolve o que a pintura não resolve bem — detalhe de geometria real (chanfros, entalhes profundos). Apostila: Parte V, Cap. 15 — Bake de Texturas.</a:t>
+              <a:t>Notas: Abertura da mini aula (20 min). Unidade III — Pintura Digital e Bake. Crítica 🔴 FORMAL (CF3) nesta semana — a 3ª das 5, primeira a avaliar o Critério 6 (Bake). Mensagem central: até agora todo detalhe foi pintado à mão sobre o low-poly (S09 desgaste, S10 stencil), complementando o Normal via Depth pintado no 3D Coat desde a S07. Hoje entra uma peça nova de workflow — esculpir/modelar detalhe em uma malha auxiliar de alta resolução e TRANSFERIR esse detalhe para o low-poly pelo bake. Deixar claro na capa: o bake não substitui a pintura; ele resolve o que a pintura não resolve bem — detalhe de geometria real (chanfros, entalhes profundos). Apostila: Parte V, Cap. 15 — Bake de Texturas.</a:t>
             </a:r>
             <a:endParaRPr lang="en-US" dirty="0"/>
           </a:p>
@@ -694,7 +694,7 @@
           <a:p>
             <a:r>
               <a:rPr lang="en-US" dirty="0"/>
-              <a:t>Notas: Ponto conceitual que gera confusão e volta nas estratégias de mediação. Analogia útil: o procedural da S7 é como textura de pele (padrão geral repetido por toda a superfície); o bake de hoje é como uma cicatriz específica (detalhe único, localizado, que veio de geometria real ali). Os dois coexistem no mesmo canal Normal, em camadas separadas. O EdgeWear/Dirt continuam pintados por cima ou ao redor.</a:t>
+              <a:t>Notas: Ponto conceitual que gera confusão e volta nas estratégias de mediação. Analogia útil: o Depth da S7 é como textura de pele (padrão geral repetido por toda a superfície, pintado diretamente na malha de produção); o bake de hoje é como uma cicatriz específica (detalhe único, localizado, que veio de geometria real ali). Os dois coexistem no mesmo canal Normal, em camadas separadas. O EdgeWear/Dirt continuam pintados por cima ou ao redor.</a:t>
             </a:r>
             <a:endParaRPr lang="en-US" dirty="0"/>
           </a:p>
@@ -870,7 +870,7 @@
           <a:p>
             <a:r>
               <a:rPr lang="en-US" dirty="0"/>
-              <a:t>Notas: Vira hábito de trabalho, como a "leitura à distância" da Semana 9. O gesto — girar o objeto e conferir cada face antes de considerar pronto — deve ser repetido a cada bake no estúdio. É a defesa contra entregar um bake com artefato para a CF4. Se disponível, mostrar um exemplo de erro preparado previamente para contraste no Image Editor.</a:t>
+              <a:t>Notas: Vira hábito de trabalho, como a "leitura à distância" da Semana 9. O gesto — girar o objeto e conferir cada face antes de considerar pronto — deve ser repetido a cada bake no estúdio. É a defesa contra entregar um bake com artefato para a CF3. Se disponível, mostrar um exemplo de erro preparado previamente para contraste no Image Editor.</a:t>
             </a:r>
             <a:endParaRPr lang="en-US" dirty="0"/>
           </a:p>
@@ -1134,7 +1134,7 @@
           <a:p>
             <a:r>
               <a:rPr lang="en-US" dirty="0"/>
-              <a:t>Notas: Amarrar a mini aula antes da demonstração. Cada item retorna na demonstração ao vivo (setup completo de Normal + AO no Blender) e no estúdio (high-poly de uma parte do asset + bake). Lembrar: hoje é 🔴 Crítica Formal CF4 no encontro 2 — Bake (C6) é avaliado pela primeira vez, com peso de 25% no Portfolio de Artefatos.</a:t>
+              <a:t>Notas: Amarrar a mini aula antes da demonstração. Cada item retorna na demonstração ao vivo (setup completo de Normal + AO no Blender) e no estúdio (high-poly de uma parte do asset + bake). Lembrar: hoje é 🔴 Crítica Formal CF3 no encontro 2 — Bake (C6) é avaliado pela primeira vez, com peso de 25% no Portfolio de Artefatos.</a:t>
             </a:r>
             <a:endParaRPr lang="en-US" dirty="0"/>
           </a:p>
@@ -1315,7 +1315,7 @@
           <a:p>
             <a:r>
               <a:rPr lang="en-US" dirty="0"/>
-              <a:t>Notas: Ler rápido. O foco PRODUTIVO da semana é apenas Normal e AO — Curvature e ID Map são apresentados hoje só conceitualmente e voltam com demonstração completa na Semana 12. Não antecipar o mascaramento automático por Curvature/ID. Objetivos alinhados ao plano de aula (itens 1 a 5); o item 6 — apresentação na CF4 — é tratado no encontro 2.</a:t>
+              <a:t>Notas: Ler rápido. O foco PRODUTIVO da semana é apenas Normal e AO — Curvature e ID Map são apresentados hoje só conceitualmente e voltam com demonstração completa na Semana 12. Não antecipar o mascaramento automático por Curvature/ID. Objetivos alinhados ao plano de aula (itens 1 a 5); o item 6 — apresentação na CF3 — é tratado no encontro 2.</a:t>
             </a:r>
             <a:endParaRPr lang="en-US" dirty="0"/>
           </a:p>
@@ -1496,7 +1496,7 @@
           <a:p>
             <a:r>
               <a:rPr lang="en-US" dirty="0"/>
-              <a:t>Notas: Revisão rápida. Reforçar a nota de transição do plano de aula: o bake NÃO substitui o que foi aprendido — um Normal Map de bake convive no mesmo material com o EdgeWear e o Dirt pintados. A pintura livre resolve mal detalhe de geometria profunda (chanfros, entalhes, sobreposição de placas); é exatamente esse buraco que o bake preenche.</a:t>
+              <a:t>Notas: Revisão rápida. Reforçar a nota de transição do plano de aula: o bake NÃO substitui o que foi aprendido — um Normal Map de bake convive no mesmo material com o EdgeWear e o Dirt pintados, e refina o Normal via Depth já pintado desde a Semana 7. A pintura livre resolve mal detalhe de geometria profunda (chanfros, entalhes, sobreposição de placas); é exatamente esse buraco que o bake preenche.</a:t>
             </a:r>
             <a:endParaRPr lang="en-US" dirty="0"/>
           </a:p>

--- a/Slides/Semana 11/semana_11_slides.pptx
+++ b/Slides/Semana 11/semana_11_slides.pptx
@@ -518,7 +518,7 @@
           <a:p>
             <a:r>
               <a:rPr lang="en-US" dirty="0"/>
-              <a:t>Notas: Abertura da mini aula (20 min). Unidade III — Pintura Digital e Bake. Crítica 🔴 FORMAL (CF3) nesta semana — a 3ª das 5, primeira a avaliar o Critério 6 (Bake). Mensagem central: até agora todo detalhe foi pintado à mão sobre o low-poly (S09 desgaste, S10 stencil), complementando o Normal via Depth pintado no 3D Coat desde a S07. Hoje entra uma peça nova de workflow — esculpir/modelar detalhe em uma malha auxiliar de alta resolução e TRANSFERIR esse detalhe para o low-poly pelo bake. Deixar claro na capa: o bake não substitui a pintura; ele resolve o que a pintura não resolve bem — detalhe de geometria real (chanfros, entalhes profundos). Apostila: Parte V, Cap. 15 — Bake de Texturas.</a:t>
+              <a:t>Notas: Abertura da mini aula (20 min). Unidade III — Pintura Digital e Bake. Crítica 🔴 FORMAL (CF3) nesta semana — a 3ª das 5, primeira a avaliar o Critério 6 (Bake). Mensagem central: até agora todo detalhe foi pintado à mão sobre o low-poly (S09 desgaste, S10 stencil), complementando o Normal via Depth pintado no 3DCoatTextura desde a S07. Hoje entra uma peça nova de workflow — esculpir/modelar detalhe em uma malha auxiliar de alta resolução e TRANSFERIR esse detalhe para o low-poly pelo bake. Deixar claro na capa: o bake não substitui a pintura; ele resolve o que a pintura não resolve bem — detalhe de geometria real (chanfros, entalhes profundos). Apostila: Parte V, Cap. 15 — Bake de Texturas.</a:t>
             </a:r>
             <a:endParaRPr lang="en-US" dirty="0"/>
           </a:p>
@@ -958,7 +958,7 @@
           <a:p>
             <a:r>
               <a:rPr lang="en-US" dirty="0"/>
-              <a:t>Notas: Deliberadamente breve. A nota do professor no plano de aula é explícita: resistir à tentação de aprofundar Curvature e ID Map agora — eles voltam na Semana 12 com demonstração completa de mascaramento automático no 3D Coat. Deixar só a semente: para quem tem um asset com dois materiais distintos (ex.: madeira + metal), esse é o candidato ideal para ID Map na próxima semana.</a:t>
+              <a:t>Notas: Deliberadamente breve. A nota do professor no plano de aula é explícita: resistir à tentação de aprofundar Curvature e ID Map agora — eles voltam na Semana 12 com demonstração completa de mascaramento automático no 3DCoatTextura. Deixar só a semente: para quem tem um asset com dois materiais distintos (ex.: madeira + metal), esse é o candidato ideal para ID Map na próxima semana.</a:t>
             </a:r>
             <a:endParaRPr lang="en-US" dirty="0"/>
           </a:p>
